--- a/docs/screenshots/mikuproject-ogp.pptx
+++ b/docs/screenshots/mikuproject-ogp.pptx
@@ -5,10 +5,11 @@
     <p:sldMasterId id="2147483660" r:id="rId1"/>
   </p:sldMasterIdLst>
   <p:notesMasterIdLst>
-    <p:notesMasterId r:id="rId3"/>
+    <p:notesMasterId r:id="rId4"/>
   </p:notesMasterIdLst>
   <p:sldIdLst>
-    <p:sldId id="256" r:id="rId2"/>
+    <p:sldId id="258" r:id="rId2"/>
+    <p:sldId id="257" r:id="rId3"/>
   </p:sldIdLst>
   <p:sldSz cx="12193588" cy="6094413"/>
   <p:notesSz cx="6858000" cy="9144000"/>
@@ -501,7 +502,13 @@
   <p:cSld>
     <p:spTree>
       <p:nvGrpSpPr>
-        <p:cNvPr id="1" name=""/>
+        <p:cNvPr id="1" name="">
+          <a:extLst>
+            <a:ext uri="{FF2B5EF4-FFF2-40B4-BE49-F238E27FC236}">
+              <a16:creationId xmlns:a16="http://schemas.microsoft.com/office/drawing/2014/main" id="{33BCF4E7-D740-5DBD-262C-C54B364D9E5A}"/>
+            </a:ext>
+          </a:extLst>
+        </p:cNvPr>
         <p:cNvGrpSpPr/>
         <p:nvPr/>
       </p:nvGrpSpPr>
@@ -515,7 +522,13 @@
       </p:grpSpPr>
       <p:sp>
         <p:nvSpPr>
-          <p:cNvPr id="2" name="スライド イメージ プレースホルダー 1"/>
+          <p:cNvPr id="2" name="スライド イメージ プレースホルダー 1">
+            <a:extLst>
+              <a:ext uri="{FF2B5EF4-FFF2-40B4-BE49-F238E27FC236}">
+                <a16:creationId xmlns:a16="http://schemas.microsoft.com/office/drawing/2014/main" id="{B995A328-E8FF-A8E6-922A-B74EFE28DFB7}"/>
+              </a:ext>
+            </a:extLst>
+          </p:cNvPr>
           <p:cNvSpPr>
             <a:spLocks noGrp="1" noRot="1" noChangeAspect="1"/>
           </p:cNvSpPr>
@@ -527,7 +540,13 @@
       </p:sp>
       <p:sp>
         <p:nvSpPr>
-          <p:cNvPr id="3" name="ノート プレースホルダー 2"/>
+          <p:cNvPr id="3" name="ノート プレースホルダー 2">
+            <a:extLst>
+              <a:ext uri="{FF2B5EF4-FFF2-40B4-BE49-F238E27FC236}">
+                <a16:creationId xmlns:a16="http://schemas.microsoft.com/office/drawing/2014/main" id="{BFEF6D9C-7DC4-C96A-4E66-ED56A19C8E33}"/>
+              </a:ext>
+            </a:extLst>
+          </p:cNvPr>
           <p:cNvSpPr>
             <a:spLocks noGrp="1"/>
           </p:cNvSpPr>
@@ -546,7 +565,13 @@
       </p:sp>
       <p:sp>
         <p:nvSpPr>
-          <p:cNvPr id="4" name="スライド番号プレースホルダー 3"/>
+          <p:cNvPr id="4" name="スライド番号プレースホルダー 3">
+            <a:extLst>
+              <a:ext uri="{FF2B5EF4-FFF2-40B4-BE49-F238E27FC236}">
+                <a16:creationId xmlns:a16="http://schemas.microsoft.com/office/drawing/2014/main" id="{525248F1-682B-198D-DDED-7D171ABB2728}"/>
+              </a:ext>
+            </a:extLst>
+          </p:cNvPr>
           <p:cNvSpPr>
             <a:spLocks noGrp="1"/>
           </p:cNvSpPr>
@@ -561,7 +586,7 @@
           <a:p>
             <a:fld id="{BEC2E336-B311-4947-89B3-858C49D96522}" type="slidenum">
               <a:rPr kumimoji="1" lang="ja-JP" altLang="en-US" smtClean="0"/>
-              <a:t>1</a:t>
+              <a:t>2</a:t>
             </a:fld>
             <a:endParaRPr kumimoji="1" lang="ja-JP" altLang="en-US"/>
           </a:p>
@@ -570,7 +595,7 @@
     </p:spTree>
     <p:extLst>
       <p:ext uri="{BB962C8B-B14F-4D97-AF65-F5344CB8AC3E}">
-        <p14:creationId xmlns:p14="http://schemas.microsoft.com/office/powerpoint/2010/main" val="3285180583"/>
+        <p14:creationId xmlns:p14="http://schemas.microsoft.com/office/powerpoint/2010/main" val="460382984"/>
       </p:ext>
     </p:extLst>
   </p:cSld>
@@ -581,7 +606,7 @@
 </file>
 
 <file path=ppt/slideLayouts/slideLayout1.xml><?xml version="1.0" encoding="utf-8"?>
-<p:sldLayout xmlns:a="http://schemas.openxmlformats.org/drawingml/2006/main" xmlns:r="http://schemas.openxmlformats.org/officeDocument/2006/relationships" xmlns:p="http://schemas.openxmlformats.org/presentationml/2006/main" type="title" preserve="1">
+<p:sldLayout xmlns:a="http://schemas.openxmlformats.org/drawingml/2006/main" xmlns:r="http://schemas.openxmlformats.org/officeDocument/2006/relationships" xmlns:p="http://schemas.openxmlformats.org/presentationml/2006/main" preserve="1" userDrawn="1">
   <p:cSld name="タイトル スライド">
     <p:spTree>
       <p:nvGrpSpPr>
@@ -597,168 +622,36 @@
           <a:chExt cx="0" cy="0"/>
         </a:xfrm>
       </p:grpSpPr>
-      <p:sp>
-        <p:nvSpPr>
-          <p:cNvPr id="2" name="Title 1"/>
-          <p:cNvSpPr>
-            <a:spLocks noGrp="1"/>
-          </p:cNvSpPr>
-          <p:nvPr>
-            <p:ph type="ctrTitle"/>
-          </p:nvPr>
-        </p:nvSpPr>
+      <p:pic>
+        <p:nvPicPr>
+          <p:cNvPr id="8" name="図 7">
+            <a:extLst>
+              <a:ext uri="{FF2B5EF4-FFF2-40B4-BE49-F238E27FC236}">
+                <a16:creationId xmlns:a16="http://schemas.microsoft.com/office/drawing/2014/main" id="{3D1C1BEA-D810-1EE1-5371-118F457D6DC5}"/>
+              </a:ext>
+            </a:extLst>
+          </p:cNvPr>
+          <p:cNvPicPr>
+            <a:picLocks noChangeAspect="1"/>
+          </p:cNvPicPr>
+          <p:nvPr userDrawn="1"/>
+        </p:nvPicPr>
+        <p:blipFill>
+          <a:blip r:embed="rId2"/>
+          <a:stretch>
+            <a:fillRect/>
+          </a:stretch>
+        </p:blipFill>
         <p:spPr>
           <a:xfrm>
-            <a:off x="1524199" y="997396"/>
-            <a:ext cx="9145191" cy="2121759"/>
+            <a:off x="0" y="-1"/>
+            <a:ext cx="12188826" cy="6094413"/>
           </a:xfrm>
+          <a:prstGeom prst="rect">
+            <a:avLst/>
+          </a:prstGeom>
         </p:spPr>
-        <p:txBody>
-          <a:bodyPr anchor="b"/>
-          <a:lstStyle>
-            <a:lvl1pPr algn="ctr">
-              <a:defRPr sz="5332"/>
-            </a:lvl1pPr>
-          </a:lstStyle>
-          <a:p>
-            <a:r>
-              <a:rPr lang="ja-JP" altLang="en-US"/>
-              <a:t>マスター タイトルの書式設定</a:t>
-            </a:r>
-            <a:endParaRPr lang="en-US" dirty="0"/>
-          </a:p>
-        </p:txBody>
-      </p:sp>
-      <p:sp>
-        <p:nvSpPr>
-          <p:cNvPr id="3" name="Subtitle 2"/>
-          <p:cNvSpPr>
-            <a:spLocks noGrp="1"/>
-          </p:cNvSpPr>
-          <p:nvPr>
-            <p:ph type="subTitle" idx="1"/>
-          </p:nvPr>
-        </p:nvSpPr>
-        <p:spPr>
-          <a:xfrm>
-            <a:off x="1524199" y="3200978"/>
-            <a:ext cx="9145191" cy="1471405"/>
-          </a:xfrm>
-        </p:spPr>
-        <p:txBody>
-          <a:bodyPr/>
-          <a:lstStyle>
-            <a:lvl1pPr marL="0" indent="0" algn="ctr">
-              <a:buNone/>
-              <a:defRPr sz="2133"/>
-            </a:lvl1pPr>
-            <a:lvl2pPr marL="406314" indent="0" algn="ctr">
-              <a:buNone/>
-              <a:defRPr sz="1777"/>
-            </a:lvl2pPr>
-            <a:lvl3pPr marL="812627" indent="0" algn="ctr">
-              <a:buNone/>
-              <a:defRPr sz="1600"/>
-            </a:lvl3pPr>
-            <a:lvl4pPr marL="1218941" indent="0" algn="ctr">
-              <a:buNone/>
-              <a:defRPr sz="1422"/>
-            </a:lvl4pPr>
-            <a:lvl5pPr marL="1625255" indent="0" algn="ctr">
-              <a:buNone/>
-              <a:defRPr sz="1422"/>
-            </a:lvl5pPr>
-            <a:lvl6pPr marL="2031568" indent="0" algn="ctr">
-              <a:buNone/>
-              <a:defRPr sz="1422"/>
-            </a:lvl6pPr>
-            <a:lvl7pPr marL="2437882" indent="0" algn="ctr">
-              <a:buNone/>
-              <a:defRPr sz="1422"/>
-            </a:lvl7pPr>
-            <a:lvl8pPr marL="2844195" indent="0" algn="ctr">
-              <a:buNone/>
-              <a:defRPr sz="1422"/>
-            </a:lvl8pPr>
-            <a:lvl9pPr marL="3250509" indent="0" algn="ctr">
-              <a:buNone/>
-              <a:defRPr sz="1422"/>
-            </a:lvl9pPr>
-          </a:lstStyle>
-          <a:p>
-            <a:r>
-              <a:rPr lang="ja-JP" altLang="en-US"/>
-              <a:t>マスター サブタイトルの書式設定</a:t>
-            </a:r>
-            <a:endParaRPr lang="en-US" dirty="0"/>
-          </a:p>
-        </p:txBody>
-      </p:sp>
-      <p:sp>
-        <p:nvSpPr>
-          <p:cNvPr id="4" name="Date Placeholder 3"/>
-          <p:cNvSpPr>
-            <a:spLocks noGrp="1"/>
-          </p:cNvSpPr>
-          <p:nvPr>
-            <p:ph type="dt" sz="half" idx="10"/>
-          </p:nvPr>
-        </p:nvSpPr>
-        <p:spPr/>
-        <p:txBody>
-          <a:bodyPr/>
-          <a:lstStyle/>
-          <a:p>
-            <a:fld id="{B491D25D-9672-1046-9F68-22A5AFD0674C}" type="datetimeFigureOut">
-              <a:rPr kumimoji="1" lang="ja-JP" altLang="en-US" smtClean="0"/>
-              <a:t>2026/4/1</a:t>
-            </a:fld>
-            <a:endParaRPr kumimoji="1" lang="ja-JP" altLang="en-US"/>
-          </a:p>
-        </p:txBody>
-      </p:sp>
-      <p:sp>
-        <p:nvSpPr>
-          <p:cNvPr id="5" name="Footer Placeholder 4"/>
-          <p:cNvSpPr>
-            <a:spLocks noGrp="1"/>
-          </p:cNvSpPr>
-          <p:nvPr>
-            <p:ph type="ftr" sz="quarter" idx="11"/>
-          </p:nvPr>
-        </p:nvSpPr>
-        <p:spPr/>
-        <p:txBody>
-          <a:bodyPr/>
-          <a:lstStyle/>
-          <a:p>
-            <a:endParaRPr kumimoji="1" lang="ja-JP" altLang="en-US"/>
-          </a:p>
-        </p:txBody>
-      </p:sp>
-      <p:sp>
-        <p:nvSpPr>
-          <p:cNvPr id="6" name="Slide Number Placeholder 5"/>
-          <p:cNvSpPr>
-            <a:spLocks noGrp="1"/>
-          </p:cNvSpPr>
-          <p:nvPr>
-            <p:ph type="sldNum" sz="quarter" idx="12"/>
-          </p:nvPr>
-        </p:nvSpPr>
-        <p:spPr/>
-        <p:txBody>
-          <a:bodyPr/>
-          <a:lstStyle/>
-          <a:p>
-            <a:fld id="{4369E26D-813D-944A-8920-339198D3FD5E}" type="slidenum">
-              <a:rPr kumimoji="1" lang="ja-JP" altLang="en-US" smtClean="0"/>
-              <a:t>‹#›</a:t>
-            </a:fld>
-            <a:endParaRPr kumimoji="1" lang="ja-JP" altLang="en-US"/>
-          </a:p>
-        </p:txBody>
-      </p:sp>
+      </p:pic>
     </p:spTree>
     <p:extLst>
       <p:ext uri="{BB962C8B-B14F-4D97-AF65-F5344CB8AC3E}">
@@ -3729,178 +3622,490 @@
           <a:chExt cx="0" cy="0"/>
         </a:xfrm>
       </p:grpSpPr>
-      <p:pic>
-        <p:nvPicPr>
-          <p:cNvPr id="15" name="図 14">
+      <p:grpSp>
+        <p:nvGrpSpPr>
+          <p:cNvPr id="17" name="グループ化 16">
             <a:extLst>
               <a:ext uri="{FF2B5EF4-FFF2-40B4-BE49-F238E27FC236}">
-                <a16:creationId xmlns:a16="http://schemas.microsoft.com/office/drawing/2014/main" id="{F491E29C-F059-D328-1755-AC64B82C0DA8}"/>
+                <a16:creationId xmlns:a16="http://schemas.microsoft.com/office/drawing/2014/main" id="{C7D435AB-CE49-37F9-6090-B6B09A66114E}"/>
               </a:ext>
             </a:extLst>
           </p:cNvPr>
-          <p:cNvPicPr>
-            <a:picLocks noChangeAspect="1"/>
-          </p:cNvPicPr>
+          <p:cNvGrpSpPr/>
           <p:nvPr/>
-        </p:nvPicPr>
-        <p:blipFill>
-          <a:blip r:embed="rId3"/>
-          <a:stretch>
-            <a:fillRect/>
-          </a:stretch>
-        </p:blipFill>
-        <p:spPr>
+        </p:nvGrpSpPr>
+        <p:grpSpPr>
           <a:xfrm>
-            <a:off x="497563" y="2439850"/>
-            <a:ext cx="4239946" cy="3288543"/>
+            <a:off x="-635618" y="-713675"/>
+            <a:ext cx="13546619" cy="6540459"/>
+            <a:chOff x="-635618" y="-713675"/>
+            <a:chExt cx="13546619" cy="6540459"/>
           </a:xfrm>
-          <a:prstGeom prst="rect">
-            <a:avLst/>
-          </a:prstGeom>
-        </p:spPr>
-      </p:pic>
-      <p:pic>
-        <p:nvPicPr>
-          <p:cNvPr id="21" name="グラフィックス 20">
+        </p:grpSpPr>
+        <p:grpSp>
+          <p:nvGrpSpPr>
+            <p:cNvPr id="18" name="グループ化 17">
+              <a:extLst>
+                <a:ext uri="{FF2B5EF4-FFF2-40B4-BE49-F238E27FC236}">
+                  <a16:creationId xmlns:a16="http://schemas.microsoft.com/office/drawing/2014/main" id="{EFD000FD-15ED-E507-5F55-4D58B138FD01}"/>
+                </a:ext>
+              </a:extLst>
+            </p:cNvPr>
+            <p:cNvGrpSpPr/>
+            <p:nvPr/>
+          </p:nvGrpSpPr>
+          <p:grpSpPr>
+            <a:xfrm>
+              <a:off x="-635618" y="-713675"/>
+              <a:ext cx="13546619" cy="5274524"/>
+              <a:chOff x="-457201" y="-189570"/>
+              <a:chExt cx="11228592" cy="4371975"/>
+            </a:xfrm>
+          </p:grpSpPr>
+          <p:pic>
+            <p:nvPicPr>
+              <p:cNvPr id="22" name="グラフィックス 21">
+                <a:extLst>
+                  <a:ext uri="{FF2B5EF4-FFF2-40B4-BE49-F238E27FC236}">
+                    <a16:creationId xmlns:a16="http://schemas.microsoft.com/office/drawing/2014/main" id="{0EB33D66-1CE9-A989-09AA-AFBB6BA593D3}"/>
+                  </a:ext>
+                </a:extLst>
+              </p:cNvPr>
+              <p:cNvPicPr>
+                <a:picLocks noChangeAspect="1"/>
+              </p:cNvPicPr>
+              <p:nvPr/>
+            </p:nvPicPr>
+            <p:blipFill>
+              <a:blip>
+                <a:extLst>
+                  <a:ext uri="{96DAC541-7B7A-43D3-8B79-37D633B846F1}">
+                    <asvg:svgBlip xmlns:asvg="http://schemas.microsoft.com/office/drawing/2016/SVG/main" r:embed="rId2"/>
+                  </a:ext>
+                </a:extLst>
+              </a:blip>
+              <a:stretch>
+                <a:fillRect/>
+              </a:stretch>
+            </p:blipFill>
+            <p:spPr>
+              <a:xfrm>
+                <a:off x="-457201" y="234176"/>
+                <a:ext cx="6641167" cy="3735657"/>
+              </a:xfrm>
+              <a:prstGeom prst="rect">
+                <a:avLst/>
+              </a:prstGeom>
+            </p:spPr>
+          </p:pic>
+          <p:pic>
+            <p:nvPicPr>
+              <p:cNvPr id="23" name="グラフィックス 22">
+                <a:extLst>
+                  <a:ext uri="{FF2B5EF4-FFF2-40B4-BE49-F238E27FC236}">
+                    <a16:creationId xmlns:a16="http://schemas.microsoft.com/office/drawing/2014/main" id="{686878C0-9F03-1EC3-DDFB-D1E11ECA8A62}"/>
+                  </a:ext>
+                </a:extLst>
+              </p:cNvPr>
+              <p:cNvPicPr>
+                <a:picLocks noChangeAspect="1"/>
+              </p:cNvPicPr>
+              <p:nvPr/>
+            </p:nvPicPr>
+            <p:blipFill>
+              <a:blip>
+                <a:extLst>
+                  <a:ext uri="{96DAC541-7B7A-43D3-8B79-37D633B846F1}">
+                    <asvg:svgBlip xmlns:asvg="http://schemas.microsoft.com/office/drawing/2016/SVG/main" r:embed="rId3"/>
+                  </a:ext>
+                </a:extLst>
+              </a:blip>
+              <a:stretch>
+                <a:fillRect/>
+              </a:stretch>
+            </p:blipFill>
+            <p:spPr>
+              <a:xfrm>
+                <a:off x="2998991" y="-189570"/>
+                <a:ext cx="7772400" cy="4371975"/>
+              </a:xfrm>
+              <a:prstGeom prst="rect">
+                <a:avLst/>
+              </a:prstGeom>
+            </p:spPr>
+          </p:pic>
+        </p:grpSp>
+        <p:pic>
+          <p:nvPicPr>
+            <p:cNvPr id="19" name="グラフィックス 18">
+              <a:extLst>
+                <a:ext uri="{FF2B5EF4-FFF2-40B4-BE49-F238E27FC236}">
+                  <a16:creationId xmlns:a16="http://schemas.microsoft.com/office/drawing/2014/main" id="{6FEBC0A0-5EEB-9A13-6856-1DBA2BE25F03}"/>
+                </a:ext>
+              </a:extLst>
+            </p:cNvPr>
+            <p:cNvPicPr>
+              <a:picLocks noChangeAspect="1"/>
+            </p:cNvPicPr>
+            <p:nvPr/>
+          </p:nvPicPr>
+          <p:blipFill>
+            <a:blip>
+              <a:extLst>
+                <a:ext uri="{96DAC541-7B7A-43D3-8B79-37D633B846F1}">
+                  <asvg:svgBlip xmlns:asvg="http://schemas.microsoft.com/office/drawing/2016/SVG/main" r:embed="rId4"/>
+                </a:ext>
+              </a:extLst>
+            </a:blip>
+            <a:stretch>
+              <a:fillRect/>
+            </a:stretch>
+          </p:blipFill>
+          <p:spPr>
+            <a:xfrm>
+              <a:off x="1028022" y="2531327"/>
+              <a:ext cx="3295457" cy="3295457"/>
+            </a:xfrm>
+            <a:prstGeom prst="rect">
+              <a:avLst/>
+            </a:prstGeom>
+          </p:spPr>
+        </p:pic>
+        <p:pic>
+          <p:nvPicPr>
+            <p:cNvPr id="20" name="グラフィックス 19">
+              <a:extLst>
+                <a:ext uri="{FF2B5EF4-FFF2-40B4-BE49-F238E27FC236}">
+                  <a16:creationId xmlns:a16="http://schemas.microsoft.com/office/drawing/2014/main" id="{8B31BB3E-6DF0-6574-4C74-B0031DDB88E8}"/>
+                </a:ext>
+              </a:extLst>
+            </p:cNvPr>
+            <p:cNvPicPr>
+              <a:picLocks noChangeAspect="1"/>
+            </p:cNvPicPr>
+            <p:nvPr/>
+          </p:nvPicPr>
+          <p:blipFill>
+            <a:blip>
+              <a:extLst>
+                <a:ext uri="{96DAC541-7B7A-43D3-8B79-37D633B846F1}">
+                  <asvg:svgBlip xmlns:asvg="http://schemas.microsoft.com/office/drawing/2016/SVG/main" r:embed="rId5"/>
+                </a:ext>
+              </a:extLst>
+            </a:blip>
+            <a:stretch>
+              <a:fillRect/>
+            </a:stretch>
+          </p:blipFill>
+          <p:spPr>
+            <a:xfrm>
+              <a:off x="4103107" y="2531327"/>
+              <a:ext cx="3295457" cy="3295457"/>
+            </a:xfrm>
+            <a:prstGeom prst="rect">
+              <a:avLst/>
+            </a:prstGeom>
+          </p:spPr>
+        </p:pic>
+        <p:pic>
+          <p:nvPicPr>
+            <p:cNvPr id="21" name="グラフィックス 20">
+              <a:extLst>
+                <a:ext uri="{FF2B5EF4-FFF2-40B4-BE49-F238E27FC236}">
+                  <a16:creationId xmlns:a16="http://schemas.microsoft.com/office/drawing/2014/main" id="{C4537671-4299-CDB6-018A-707431F4F7E3}"/>
+                </a:ext>
+              </a:extLst>
+            </p:cNvPr>
+            <p:cNvPicPr>
+              <a:picLocks noChangeAspect="1"/>
+            </p:cNvPicPr>
+            <p:nvPr/>
+          </p:nvPicPr>
+          <p:blipFill>
+            <a:blip>
+              <a:extLst>
+                <a:ext uri="{96DAC541-7B7A-43D3-8B79-37D633B846F1}">
+                  <asvg:svgBlip xmlns:asvg="http://schemas.microsoft.com/office/drawing/2016/SVG/main" r:embed="rId6"/>
+                </a:ext>
+              </a:extLst>
+            </a:blip>
+            <a:stretch>
+              <a:fillRect/>
+            </a:stretch>
+          </p:blipFill>
+          <p:spPr>
+            <a:xfrm>
+              <a:off x="7188449" y="2531326"/>
+              <a:ext cx="3295458" cy="3295458"/>
+            </a:xfrm>
+            <a:prstGeom prst="rect">
+              <a:avLst/>
+            </a:prstGeom>
+          </p:spPr>
+        </p:pic>
+      </p:grpSp>
+    </p:spTree>
+    <p:extLst>
+      <p:ext uri="{BB962C8B-B14F-4D97-AF65-F5344CB8AC3E}">
+        <p14:creationId xmlns:p14="http://schemas.microsoft.com/office/powerpoint/2010/main" val="2071478948"/>
+      </p:ext>
+    </p:extLst>
+  </p:cSld>
+  <p:clrMapOvr>
+    <a:masterClrMapping/>
+  </p:clrMapOvr>
+</p:sld>
+</file>
+
+<file path=ppt/slides/slide2.xml><?xml version="1.0" encoding="utf-8"?>
+<p:sld xmlns:a="http://schemas.openxmlformats.org/drawingml/2006/main" xmlns:r="http://schemas.openxmlformats.org/officeDocument/2006/relationships" xmlns:p="http://schemas.openxmlformats.org/presentationml/2006/main">
+  <p:cSld>
+    <p:spTree>
+      <p:nvGrpSpPr>
+        <p:cNvPr id="1" name="">
+          <a:extLst>
+            <a:ext uri="{FF2B5EF4-FFF2-40B4-BE49-F238E27FC236}">
+              <a16:creationId xmlns:a16="http://schemas.microsoft.com/office/drawing/2014/main" id="{42E87E7B-0FAD-BF2C-9486-770E8E1AADB7}"/>
+            </a:ext>
+          </a:extLst>
+        </p:cNvPr>
+        <p:cNvGrpSpPr/>
+        <p:nvPr/>
+      </p:nvGrpSpPr>
+      <p:grpSpPr>
+        <a:xfrm>
+          <a:off x="0" y="0"/>
+          <a:ext cx="0" cy="0"/>
+          <a:chOff x="0" y="0"/>
+          <a:chExt cx="0" cy="0"/>
+        </a:xfrm>
+      </p:grpSpPr>
+      <p:grpSp>
+        <p:nvGrpSpPr>
+          <p:cNvPr id="22" name="グループ化 21">
             <a:extLst>
               <a:ext uri="{FF2B5EF4-FFF2-40B4-BE49-F238E27FC236}">
-                <a16:creationId xmlns:a16="http://schemas.microsoft.com/office/drawing/2014/main" id="{EED4F83B-11EC-8CB0-7124-F9B7623DD97E}"/>
+                <a16:creationId xmlns:a16="http://schemas.microsoft.com/office/drawing/2014/main" id="{5280CE3F-2CBB-2A02-A839-CFDB4CA82E41}"/>
               </a:ext>
             </a:extLst>
           </p:cNvPr>
-          <p:cNvPicPr>
-            <a:picLocks noChangeAspect="1"/>
-          </p:cNvPicPr>
+          <p:cNvGrpSpPr/>
           <p:nvPr/>
-        </p:nvPicPr>
-        <p:blipFill>
-          <a:blip>
-            <a:extLst>
-              <a:ext uri="{96DAC541-7B7A-43D3-8B79-37D633B846F1}">
-                <asvg:svgBlip xmlns:asvg="http://schemas.microsoft.com/office/drawing/2016/SVG/main" r:embed="rId4"/>
-              </a:ext>
-            </a:extLst>
-          </a:blip>
-          <a:stretch>
-            <a:fillRect/>
-          </a:stretch>
-        </p:blipFill>
-        <p:spPr>
+        </p:nvGrpSpPr>
+        <p:grpSpPr>
           <a:xfrm>
-            <a:off x="2521317" y="1700731"/>
-            <a:ext cx="6488869" cy="4262296"/>
+            <a:off x="-635618" y="-713675"/>
+            <a:ext cx="13546619" cy="6540459"/>
+            <a:chOff x="-635618" y="-713675"/>
+            <a:chExt cx="13546619" cy="6540459"/>
           </a:xfrm>
-          <a:prstGeom prst="rect">
-            <a:avLst/>
-          </a:prstGeom>
-        </p:spPr>
-      </p:pic>
-      <p:pic>
-        <p:nvPicPr>
-          <p:cNvPr id="9" name="図 8">
-            <a:extLst>
-              <a:ext uri="{FF2B5EF4-FFF2-40B4-BE49-F238E27FC236}">
-                <a16:creationId xmlns:a16="http://schemas.microsoft.com/office/drawing/2014/main" id="{528E05D9-D410-8903-8F48-CCBEA1FE4980}"/>
-              </a:ext>
-            </a:extLst>
-          </p:cNvPr>
-          <p:cNvPicPr>
-            <a:picLocks noChangeAspect="1"/>
-          </p:cNvPicPr>
-          <p:nvPr/>
-        </p:nvPicPr>
-        <p:blipFill>
-          <a:blip r:embed="rId5"/>
-          <a:stretch>
-            <a:fillRect/>
-          </a:stretch>
-        </p:blipFill>
-        <p:spPr>
-          <a:xfrm>
-            <a:off x="8180671" y="2736528"/>
-            <a:ext cx="4079019" cy="4036138"/>
-          </a:xfrm>
-          <a:prstGeom prst="rect">
-            <a:avLst/>
-          </a:prstGeom>
-        </p:spPr>
-      </p:pic>
-      <p:pic>
-        <p:nvPicPr>
-          <p:cNvPr id="7" name="図 6">
-            <a:extLst>
-              <a:ext uri="{FF2B5EF4-FFF2-40B4-BE49-F238E27FC236}">
-                <a16:creationId xmlns:a16="http://schemas.microsoft.com/office/drawing/2014/main" id="{3AE53139-ED03-71EA-75A6-8288295C3934}"/>
-              </a:ext>
-            </a:extLst>
-          </p:cNvPr>
-          <p:cNvPicPr>
-            <a:picLocks noChangeAspect="1"/>
-          </p:cNvPicPr>
-          <p:nvPr/>
-        </p:nvPicPr>
-        <p:blipFill>
-          <a:blip r:embed="rId6"/>
-          <a:stretch>
-            <a:fillRect/>
-          </a:stretch>
-        </p:blipFill>
-        <p:spPr>
-          <a:xfrm>
-            <a:off x="7567186" y="520420"/>
-            <a:ext cx="4210169" cy="2097850"/>
-          </a:xfrm>
-          <a:prstGeom prst="rect">
-            <a:avLst/>
-          </a:prstGeom>
-        </p:spPr>
-      </p:pic>
-      <p:sp>
-        <p:nvSpPr>
-          <p:cNvPr id="18" name="テキスト ボックス 17">
-            <a:extLst>
-              <a:ext uri="{FF2B5EF4-FFF2-40B4-BE49-F238E27FC236}">
-                <a16:creationId xmlns:a16="http://schemas.microsoft.com/office/drawing/2014/main" id="{6E7B811C-65AA-F391-395A-47B45F77FE56}"/>
-              </a:ext>
-            </a:extLst>
-          </p:cNvPr>
-          <p:cNvSpPr txBox="1"/>
-          <p:nvPr/>
-        </p:nvSpPr>
-        <p:spPr>
-          <a:xfrm>
-            <a:off x="709990" y="623513"/>
-            <a:ext cx="4969630" cy="1077218"/>
-          </a:xfrm>
-          <a:prstGeom prst="rect">
-            <a:avLst/>
-          </a:prstGeom>
-          <a:noFill/>
-        </p:spPr>
-        <p:txBody>
-          <a:bodyPr wrap="none" rtlCol="0">
-            <a:spAutoFit/>
-          </a:bodyPr>
-          <a:lstStyle/>
-          <a:p>
-            <a:r>
-              <a:rPr kumimoji="1" lang="en-US" altLang="ja-JP" sz="6400" dirty="0" err="1">
-                <a:latin typeface="Lucida Grande" panose="020B0600040502020204" pitchFamily="34" charset="0"/>
-                <a:cs typeface="Lucida Grande" panose="020B0600040502020204" pitchFamily="34" charset="0"/>
-              </a:rPr>
-              <a:t>mikuproject</a:t>
-            </a:r>
-            <a:endParaRPr kumimoji="1" lang="ja-JP" altLang="en-US" sz="6400">
-              <a:latin typeface="Lucida Grande" panose="020B0600040502020204" pitchFamily="34" charset="0"/>
-              <a:cs typeface="Lucida Grande" panose="020B0600040502020204" pitchFamily="34" charset="0"/>
-            </a:endParaRPr>
-          </a:p>
-        </p:txBody>
-      </p:sp>
+        </p:grpSpPr>
+        <p:grpSp>
+          <p:nvGrpSpPr>
+            <p:cNvPr id="23" name="グループ化 22">
+              <a:extLst>
+                <a:ext uri="{FF2B5EF4-FFF2-40B4-BE49-F238E27FC236}">
+                  <a16:creationId xmlns:a16="http://schemas.microsoft.com/office/drawing/2014/main" id="{08AB4E63-98FE-EEEE-C54E-7AD133A6A87C}"/>
+                </a:ext>
+              </a:extLst>
+            </p:cNvPr>
+            <p:cNvGrpSpPr/>
+            <p:nvPr/>
+          </p:nvGrpSpPr>
+          <p:grpSpPr>
+            <a:xfrm>
+              <a:off x="-635618" y="-713675"/>
+              <a:ext cx="13546619" cy="5274524"/>
+              <a:chOff x="-457201" y="-189570"/>
+              <a:chExt cx="11228592" cy="4371975"/>
+            </a:xfrm>
+          </p:grpSpPr>
+          <p:pic>
+            <p:nvPicPr>
+              <p:cNvPr id="27" name="グラフィックス 26">
+                <a:extLst>
+                  <a:ext uri="{FF2B5EF4-FFF2-40B4-BE49-F238E27FC236}">
+                    <a16:creationId xmlns:a16="http://schemas.microsoft.com/office/drawing/2014/main" id="{6C5C29E1-233F-F50F-2192-7C297A48FED8}"/>
+                  </a:ext>
+                </a:extLst>
+              </p:cNvPr>
+              <p:cNvPicPr>
+                <a:picLocks noChangeAspect="1"/>
+              </p:cNvPicPr>
+              <p:nvPr/>
+            </p:nvPicPr>
+            <p:blipFill>
+              <a:blip>
+                <a:extLst>
+                  <a:ext uri="{96DAC541-7B7A-43D3-8B79-37D633B846F1}">
+                    <asvg:svgBlip xmlns:asvg="http://schemas.microsoft.com/office/drawing/2016/SVG/main" r:embed="rId3"/>
+                  </a:ext>
+                </a:extLst>
+              </a:blip>
+              <a:stretch>
+                <a:fillRect/>
+              </a:stretch>
+            </p:blipFill>
+            <p:spPr>
+              <a:xfrm>
+                <a:off x="-457201" y="234176"/>
+                <a:ext cx="6641167" cy="3735657"/>
+              </a:xfrm>
+              <a:prstGeom prst="rect">
+                <a:avLst/>
+              </a:prstGeom>
+            </p:spPr>
+          </p:pic>
+          <p:pic>
+            <p:nvPicPr>
+              <p:cNvPr id="28" name="グラフィックス 27">
+                <a:extLst>
+                  <a:ext uri="{FF2B5EF4-FFF2-40B4-BE49-F238E27FC236}">
+                    <a16:creationId xmlns:a16="http://schemas.microsoft.com/office/drawing/2014/main" id="{995C4558-4BAB-4355-A54B-E41E965299D2}"/>
+                  </a:ext>
+                </a:extLst>
+              </p:cNvPr>
+              <p:cNvPicPr>
+                <a:picLocks noChangeAspect="1"/>
+              </p:cNvPicPr>
+              <p:nvPr/>
+            </p:nvPicPr>
+            <p:blipFill>
+              <a:blip>
+                <a:extLst>
+                  <a:ext uri="{96DAC541-7B7A-43D3-8B79-37D633B846F1}">
+                    <asvg:svgBlip xmlns:asvg="http://schemas.microsoft.com/office/drawing/2016/SVG/main" r:embed="rId4"/>
+                  </a:ext>
+                </a:extLst>
+              </a:blip>
+              <a:stretch>
+                <a:fillRect/>
+              </a:stretch>
+            </p:blipFill>
+            <p:spPr>
+              <a:xfrm>
+                <a:off x="2998991" y="-189570"/>
+                <a:ext cx="7772400" cy="4371975"/>
+              </a:xfrm>
+              <a:prstGeom prst="rect">
+                <a:avLst/>
+              </a:prstGeom>
+            </p:spPr>
+          </p:pic>
+        </p:grpSp>
+        <p:pic>
+          <p:nvPicPr>
+            <p:cNvPr id="24" name="グラフィックス 23">
+              <a:extLst>
+                <a:ext uri="{FF2B5EF4-FFF2-40B4-BE49-F238E27FC236}">
+                  <a16:creationId xmlns:a16="http://schemas.microsoft.com/office/drawing/2014/main" id="{1020A7D8-C8C4-5ED0-907F-79F0948CCB78}"/>
+                </a:ext>
+              </a:extLst>
+            </p:cNvPr>
+            <p:cNvPicPr>
+              <a:picLocks noChangeAspect="1"/>
+            </p:cNvPicPr>
+            <p:nvPr/>
+          </p:nvPicPr>
+          <p:blipFill>
+            <a:blip>
+              <a:extLst>
+                <a:ext uri="{96DAC541-7B7A-43D3-8B79-37D633B846F1}">
+                  <asvg:svgBlip xmlns:asvg="http://schemas.microsoft.com/office/drawing/2016/SVG/main" r:embed="rId5"/>
+                </a:ext>
+              </a:extLst>
+            </a:blip>
+            <a:stretch>
+              <a:fillRect/>
+            </a:stretch>
+          </p:blipFill>
+          <p:spPr>
+            <a:xfrm>
+              <a:off x="1028022" y="2531327"/>
+              <a:ext cx="3295457" cy="3295457"/>
+            </a:xfrm>
+            <a:prstGeom prst="rect">
+              <a:avLst/>
+            </a:prstGeom>
+          </p:spPr>
+        </p:pic>
+        <p:pic>
+          <p:nvPicPr>
+            <p:cNvPr id="25" name="グラフィックス 24">
+              <a:extLst>
+                <a:ext uri="{FF2B5EF4-FFF2-40B4-BE49-F238E27FC236}">
+                  <a16:creationId xmlns:a16="http://schemas.microsoft.com/office/drawing/2014/main" id="{44C337D7-5865-0835-CDB2-BCA59EE78AB0}"/>
+                </a:ext>
+              </a:extLst>
+            </p:cNvPr>
+            <p:cNvPicPr>
+              <a:picLocks noChangeAspect="1"/>
+            </p:cNvPicPr>
+            <p:nvPr/>
+          </p:nvPicPr>
+          <p:blipFill>
+            <a:blip>
+              <a:extLst>
+                <a:ext uri="{96DAC541-7B7A-43D3-8B79-37D633B846F1}">
+                  <asvg:svgBlip xmlns:asvg="http://schemas.microsoft.com/office/drawing/2016/SVG/main" r:embed="rId6"/>
+                </a:ext>
+              </a:extLst>
+            </a:blip>
+            <a:stretch>
+              <a:fillRect/>
+            </a:stretch>
+          </p:blipFill>
+          <p:spPr>
+            <a:xfrm>
+              <a:off x="4103107" y="2531327"/>
+              <a:ext cx="3295457" cy="3295457"/>
+            </a:xfrm>
+            <a:prstGeom prst="rect">
+              <a:avLst/>
+            </a:prstGeom>
+          </p:spPr>
+        </p:pic>
+        <p:pic>
+          <p:nvPicPr>
+            <p:cNvPr id="26" name="グラフィックス 25">
+              <a:extLst>
+                <a:ext uri="{FF2B5EF4-FFF2-40B4-BE49-F238E27FC236}">
+                  <a16:creationId xmlns:a16="http://schemas.microsoft.com/office/drawing/2014/main" id="{FBD87AF3-847D-F90E-527C-A0E1EB5CCB25}"/>
+                </a:ext>
+              </a:extLst>
+            </p:cNvPr>
+            <p:cNvPicPr>
+              <a:picLocks noChangeAspect="1"/>
+            </p:cNvPicPr>
+            <p:nvPr/>
+          </p:nvPicPr>
+          <p:blipFill>
+            <a:blip>
+              <a:extLst>
+                <a:ext uri="{96DAC541-7B7A-43D3-8B79-37D633B846F1}">
+                  <asvg:svgBlip xmlns:asvg="http://schemas.microsoft.com/office/drawing/2016/SVG/main" r:embed="rId7"/>
+                </a:ext>
+              </a:extLst>
+            </a:blip>
+            <a:stretch>
+              <a:fillRect/>
+            </a:stretch>
+          </p:blipFill>
+          <p:spPr>
+            <a:xfrm>
+              <a:off x="7188449" y="2531326"/>
+              <a:ext cx="3295458" cy="3295458"/>
+            </a:xfrm>
+            <a:prstGeom prst="rect">
+              <a:avLst/>
+            </a:prstGeom>
+          </p:spPr>
+        </p:pic>
+      </p:grpSp>
     </p:spTree>
     <p:extLst>
       <p:ext uri="{BB962C8B-B14F-4D97-AF65-F5344CB8AC3E}">
-        <p14:creationId xmlns:p14="http://schemas.microsoft.com/office/powerpoint/2010/main" val="3876103769"/>
+        <p14:creationId xmlns:p14="http://schemas.microsoft.com/office/powerpoint/2010/main" val="613446027"/>
       </p:ext>
     </p:extLst>
   </p:cSld>
